--- a/10-Knowledge-Products/KP1-GEA/videos/module_6/en/decks/KP1_M6_6.2_Deck_v0.1.pptx
+++ b/10-Knowledge-Products/KP1-GEA/videos/module_6/en/decks/KP1_M6_6.2_Deck_v0.1.pptx
@@ -1085,7 +1085,7 @@
           <a:lstStyle/>
           <a:p>
             <a:r>
-              <a:t>VO: Now the failures, because forewarned is forearmed. The team gets pulled onto the flagship project that is in trouble, and the architecture work stops. The minister or director-general who championed it moves on, and the successor has their own priorities. The governance board, under delivery pressure, lets one powerful project through, then another, until its no means nothing. And the funding, never secured as a multi-year commitment, quietly becomes an annual favour that one budget cycle removes. None of these is dramatic. Each is a slow fade, usually in the second year.</a:t>
+              <a:t>VO: Now the failures, because forewarned is forearmed. The team gets pulled onto the flagship project that is in trouble, and the architecture work stops. The minister or director-general who championed it moves on, and the successor has their own priorities. The governance board, under delivery pressure, lets one powerful project through, then another, until its "no" means nothing. And the funding, never secured as a multi-year commitment, quietly becomes an annual favour that one budget cycle removes. None of these is dramatic. Each is a slow fade, usually in the second year.</a:t>
             </a:r>
           </a:p>
           <a:p/>
@@ -13539,7 +13539,7 @@
                 </a:solidFill>
                 <a:latin typeface="Arial"/>
               </a:rPr>
-              <a:t>One powerful project through, then another, until its no means nothing.</a:t>
+              <a:t>One powerful project through, then another, until its "no" means nothing.</a:t>
             </a:r>
           </a:p>
         </p:txBody>
